--- a/lvf_global_var/doc/slides/invention_4steps.pptx
+++ b/lvf_global_var/doc/slides/invention_4steps.pptx
@@ -3827,7 +3827,7 @@
                 <a:latin typeface="Malgun Gothic"/>
                 <a:ea typeface="Malgun Gothic"/>
               </a:rPr>
-              <a:t>TR 기여도 × USM 결합으로 재특성화 없이 변동 반영</a:t>
+              <a:t>기여도로 집합값을 TR 단위로 환산해 LLE DM에 연결</a:t>
             </a:r>
           </a:p>
         </p:txBody>
@@ -3867,7 +3867,7 @@
                 <a:latin typeface="Malgun Gothic"/>
                 <a:ea typeface="Malgun Gothic"/>
               </a:rPr>
-              <a:t>LVF 특성화 결과를 재사용하여 트랜지스터별 민감도를 복원하고, 모든 변동 원인을 하나의 식으로 처리한다.</a:t>
+              <a:t>셀 단위로만 주어지는 집합값을 기여도로 트랜지스터 단위로 환산하여, 트랜지스터별 변동량을 쓰는 LLE DM에 연결한다.</a:t>
             </a:r>
           </a:p>
         </p:txBody>
@@ -4332,7 +4332,7 @@
                 <a:latin typeface="Malgun Gothic"/>
                 <a:ea typeface="Malgun Gothic"/>
               </a:rPr>
-              <a:t>TR별 민감도 복원</a:t>
+              <a:t>TR별 값으로 환산</a:t>
             </a:r>
           </a:p>
         </p:txBody>
@@ -4411,7 +4411,7 @@
                 <a:latin typeface="Malgun Gothic"/>
                 <a:ea typeface="Malgun Gothic"/>
               </a:rPr>
-              <a:t>USM 라이브러리의 집합 민감도</a:t>
+              <a:t>USM 라이브러리의 집합 변화량</a:t>
             </a:r>
           </a:p>
           <a:p>
@@ -4428,7 +4428,7 @@
                 <a:latin typeface="Malgun Gothic"/>
                 <a:ea typeface="Malgun Gothic"/>
               </a:rPr>
-              <a:t>S_agg(p)</a:t>
+              <a:t>셀 전체를 함께 흔든 결과</a:t>
             </a:r>
           </a:p>
         </p:txBody>
@@ -4507,7 +4507,7 @@
                 <a:latin typeface="Consolas"/>
                 <a:ea typeface="Malgun Gothic"/>
               </a:rPr>
-              <a:t>S_rec(i, p) = C(i) · S_agg(p)</a:t>
+              <a:t>TR별 값 = C(i) × 집합값</a:t>
             </a:r>
           </a:p>
         </p:txBody>
@@ -4586,7 +4586,7 @@
                 <a:latin typeface="Malgun Gothic"/>
                 <a:ea typeface="Malgun Gothic"/>
               </a:rPr>
-              <a:t>TR별 파라미터 민감도</a:t>
+              <a:t>TR별 민감도 / 변동량</a:t>
             </a:r>
           </a:p>
           <a:p>
@@ -4603,7 +4603,7 @@
                 <a:latin typeface="Malgun Gothic"/>
                 <a:ea typeface="Malgun Gothic"/>
               </a:rPr>
-              <a:t>전역 변동 예측에 사용</a:t>
+              <a:t>TR 단위로 사용 가능</a:t>
             </a:r>
           </a:p>
         </p:txBody>
@@ -5454,7 +5454,7 @@
                 <a:latin typeface="Malgun Gothic"/>
                 <a:ea typeface="Malgun Gothic"/>
               </a:rPr>
-              <a:t>개별 TR 특성화 시뮬레이션 추가 없음. 새로운 변동 원인은 Δp(i, p)만 교체하면 동일 경로로 처리된다.</a:t>
+              <a:t>개별 TR 특성화 시뮬레이션 추가 없음. LLE, 전역 파라미터 이동, 열화가 Δp(i, p)만 바꾸어 같은 경로로 들어온다.</a:t>
             </a:r>
           </a:p>
         </p:txBody>
@@ -5942,7 +5942,7 @@
                 <a:latin typeface="Malgun Gothic"/>
                 <a:ea typeface="Malgun Gothic"/>
               </a:rPr>
-              <a:t>부호를 유지하면 복원 오차가 더 작다</a:t>
+              <a:t>부호를 유지하면 환산 오차가 더 작다</a:t>
             </a:r>
           </a:p>
           <a:p>
@@ -6946,7 +6946,7 @@
                 <a:latin typeface="Malgun Gothic"/>
                 <a:ea typeface="Malgun Gothic"/>
               </a:rPr>
-              <a:t>USM에 기여도를 곱하면 TR별로 분해된다</a:t>
+              <a:t>집합값은 기여도를 곱해야 TR 단위가 된다</a:t>
             </a:r>
           </a:p>
         </p:txBody>
@@ -6986,7 +6986,7 @@
                 <a:latin typeface="Malgun Gothic"/>
                 <a:ea typeface="Malgun Gothic"/>
               </a:rPr>
-              <a:t>USM 민감도는 셀 전체를 동시에 섭동한 값이라 TR 식별 정보가 없다. 기여도가 그 정보를 보완한다.</a:t>
+              <a:t>USM 값은 셀 전체를 동시에 섭동한 결과라 TR 식별 정보가 없다. LLE DM은 TR별 Δp를 주는데 받을 상대가 없다.</a:t>
             </a:r>
           </a:p>
         </p:txBody>
@@ -7319,7 +7319,7 @@
                 <a:latin typeface="Malgun Gothic"/>
                 <a:ea typeface="Malgun Gothic"/>
               </a:rPr>
-              <a:t>USM 민감도 S_agg(p)는 셀 전체의 합이다. 트랜지스터별로 나눌 근거가 라이브러리 안에 없다.</a:t>
+              <a:t>USM 값 S_agg(p)는 셀 전체의 합이다. LLE DM이 만든 TR별 Δp를 곱할 TR별 상대가 없다.</a:t>
             </a:r>
           </a:p>
         </p:txBody>
@@ -7381,7 +7381,7 @@
                 <a:latin typeface="Malgun Gothic"/>
                 <a:ea typeface="Malgun Gothic"/>
               </a:rPr>
-              <a:t>해결</a:t>
+              <a:t>환산</a:t>
             </a:r>
           </a:p>
         </p:txBody>
@@ -7607,7 +7607,7 @@
                 <a:latin typeface="Malgun Gothic"/>
                 <a:ea typeface="Malgun Gothic"/>
               </a:rPr>
-              <a:t>복원 정확도 — 그룹 동시 섭동으로 얻은 직접 민감도 대비 (3σ, 지연 대비 %)</a:t>
+              <a:t>환산 정확도 — 그룹 동시 섭동으로 얻은 직접 민감도 대비 (3σ, 지연 대비 %)</a:t>
             </a:r>
           </a:p>
         </p:txBody>
@@ -8305,7 +8305,7 @@
                 <a:latin typeface="Malgun Gothic"/>
                 <a:ea typeface="Malgun Gothic"/>
               </a:rPr>
-              <a:t>정합성 조건을 만족하므로, 동시 변동 시 타이밍 변화량이 개별 TR 변화량의 합과 일치한다.</a:t>
+              <a:t>환산이 정합성 조건을 만족하므로, 모든 TR을 같은 양으로 움직이면 집합값이 그대로 복구된다.</a:t>
             </a:r>
           </a:p>
           <a:p>
@@ -9477,7 +9477,7 @@
                           <a:latin typeface="Malgun Gothic"/>
                           <a:ea typeface="Malgun Gothic"/>
                         </a:rPr>
-                        <a:t>기여도 × 집합 민감도로 복원</a:t>
+                        <a:t>기여도로 집합값을 환산</a:t>
                       </a:r>
                     </a:p>
                   </a:txBody>
@@ -10529,7 +10529,7 @@
                           <a:latin typeface="Malgun Gothic"/>
                           <a:ea typeface="Malgun Gothic"/>
                         </a:rPr>
-                        <a:t>전역 공정 변동</a:t>
+                        <a:t>전역 파라미터 이동</a:t>
                       </a:r>
                     </a:p>
                   </a:txBody>
@@ -10581,7 +10581,7 @@
                           <a:latin typeface="Malgun Gothic"/>
                           <a:ea typeface="Malgun Gothic"/>
                         </a:rPr>
-                        <a:t>공정 코너 정의  ΔVth, ΔU0</a:t>
+                        <a:t>전역 변동점 정의  ΔVth, ΔU0</a:t>
                       </a:r>
                     </a:p>
                   </a:txBody>
@@ -11752,7 +11752,7 @@
                           <a:latin typeface="Malgun Gothic"/>
                           <a:ea typeface="Malgun Gothic"/>
                         </a:rPr>
-                        <a:t>±3σ 복합 코너</a:t>
+                        <a:t>±3σ 복합 변동점</a:t>
                       </a:r>
                     </a:p>
                   </a:txBody>

--- a/lvf_global_var/doc/slides/invention_4steps.pptx
+++ b/lvf_global_var/doc/slides/invention_4steps.pptx
@@ -3827,7 +3827,7 @@
                 <a:latin typeface="Malgun Gothic"/>
                 <a:ea typeface="Malgun Gothic"/>
               </a:rPr>
-              <a:t>기여도로 집합값을 TR 단위로 환산해 LLE DM에 연결</a:t>
+              <a:t>LVF 민감도로 각 TR의 global variation을 예측한다</a:t>
             </a:r>
           </a:p>
         </p:txBody>
@@ -3867,7 +3867,7 @@
                 <a:latin typeface="Malgun Gothic"/>
                 <a:ea typeface="Malgun Gothic"/>
               </a:rPr>
-              <a:t>셀 단위로만 주어지는 집합값을 기여도로 트랜지스터 단위로 환산하여, 트랜지스터별 변동량을 쓰는 LLE DM에 연결한다.</a:t>
+              <a:t>국부 변동 σ 산출에 쓴 TR별 민감도를 재사용하여 각 TR이 global variation에서 차지하는 몫을 구하고, 이를 LLE와 aging 등 TR마다 변동량이 다른 경우의 보정에 활용한다.</a:t>
             </a:r>
           </a:p>
         </p:txBody>
@@ -3880,8 +3880,8 @@
         </p:nvSpPr>
         <p:spPr>
           <a:xfrm>
-            <a:off x="493776" y="1243584"/>
-            <a:ext cx="2514600" cy="603504"/>
+            <a:off x="493776" y="1207008"/>
+            <a:ext cx="2514600" cy="731520"/>
           </a:xfrm>
           <a:prstGeom prst="rect">
             <a:avLst/>
@@ -3959,8 +3959,8 @@
         </p:nvSpPr>
         <p:spPr>
           <a:xfrm>
-            <a:off x="493776" y="1883664"/>
-            <a:ext cx="2514600" cy="950976"/>
+            <a:off x="493776" y="1938528"/>
+            <a:ext cx="2514600" cy="914400"/>
           </a:xfrm>
           <a:prstGeom prst="rect">
             <a:avLst/>
@@ -4055,8 +4055,8 @@
         </p:nvSpPr>
         <p:spPr>
           <a:xfrm>
-            <a:off x="493776" y="2834640"/>
-            <a:ext cx="2514600" cy="950976"/>
+            <a:off x="493776" y="2852928"/>
+            <a:ext cx="2514600" cy="914400"/>
           </a:xfrm>
           <a:prstGeom prst="rect">
             <a:avLst/>
@@ -4134,8 +4134,8 @@
         </p:nvSpPr>
         <p:spPr>
           <a:xfrm>
-            <a:off x="493776" y="3785616"/>
-            <a:ext cx="2514600" cy="950976"/>
+            <a:off x="493776" y="3767328"/>
+            <a:ext cx="2514600" cy="914400"/>
           </a:xfrm>
           <a:prstGeom prst="rect">
             <a:avLst/>
@@ -4266,8 +4266,8 @@
         </p:nvSpPr>
         <p:spPr>
           <a:xfrm>
-            <a:off x="3392424" y="1243584"/>
-            <a:ext cx="2514600" cy="603504"/>
+            <a:off x="3392424" y="1207008"/>
+            <a:ext cx="2514600" cy="731520"/>
           </a:xfrm>
           <a:prstGeom prst="rect">
             <a:avLst/>
@@ -4332,7 +4332,7 @@
                 <a:latin typeface="Malgun Gothic"/>
                 <a:ea typeface="Malgun Gothic"/>
               </a:rPr>
-              <a:t>TR별 값으로 환산</a:t>
+              <a:t>TR별 global variation 예측</a:t>
             </a:r>
           </a:p>
         </p:txBody>
@@ -4345,8 +4345,8 @@
         </p:nvSpPr>
         <p:spPr>
           <a:xfrm>
-            <a:off x="3392424" y="1883664"/>
-            <a:ext cx="2514600" cy="950976"/>
+            <a:off x="3392424" y="1938528"/>
+            <a:ext cx="2514600" cy="914400"/>
           </a:xfrm>
           <a:prstGeom prst="rect">
             <a:avLst/>
@@ -4411,7 +4411,7 @@
                 <a:latin typeface="Malgun Gothic"/>
                 <a:ea typeface="Malgun Gothic"/>
               </a:rPr>
-              <a:t>USM 라이브러리의 집합 변화량</a:t>
+              <a:t>USM의 집합 global 변화량</a:t>
             </a:r>
           </a:p>
           <a:p>
@@ -4428,7 +4428,7 @@
                 <a:latin typeface="Malgun Gothic"/>
                 <a:ea typeface="Malgun Gothic"/>
               </a:rPr>
-              <a:t>셀 전체를 함께 흔든 결과</a:t>
+              <a:t>S_agg(p)</a:t>
             </a:r>
           </a:p>
         </p:txBody>
@@ -4441,8 +4441,8 @@
         </p:nvSpPr>
         <p:spPr>
           <a:xfrm>
-            <a:off x="3392424" y="2834640"/>
-            <a:ext cx="2514600" cy="950976"/>
+            <a:off x="3392424" y="2852928"/>
+            <a:ext cx="2514600" cy="914400"/>
           </a:xfrm>
           <a:prstGeom prst="rect">
             <a:avLst/>
@@ -4507,7 +4507,7 @@
                 <a:latin typeface="Consolas"/>
                 <a:ea typeface="Malgun Gothic"/>
               </a:rPr>
-              <a:t>TR별 값 = C(i) × 집합값</a:t>
+              <a:t>S(i, p) = C(i) · S_agg(p)</a:t>
             </a:r>
           </a:p>
         </p:txBody>
@@ -4520,8 +4520,8 @@
         </p:nvSpPr>
         <p:spPr>
           <a:xfrm>
-            <a:off x="3392424" y="3785616"/>
-            <a:ext cx="2514600" cy="950976"/>
+            <a:off x="3392424" y="3767328"/>
+            <a:ext cx="2514600" cy="914400"/>
           </a:xfrm>
           <a:prstGeom prst="rect">
             <a:avLst/>
@@ -4586,7 +4586,7 @@
                 <a:latin typeface="Malgun Gothic"/>
                 <a:ea typeface="Malgun Gothic"/>
               </a:rPr>
-              <a:t>TR별 민감도 / 변동량</a:t>
+              <a:t>각 TR이 차지하는 몫</a:t>
             </a:r>
           </a:p>
           <a:p>
@@ -4603,7 +4603,7 @@
                 <a:latin typeface="Malgun Gothic"/>
                 <a:ea typeface="Malgun Gothic"/>
               </a:rPr>
-              <a:t>TR 단위로 사용 가능</a:t>
+              <a:t>TR별 민감도 확보</a:t>
             </a:r>
           </a:p>
         </p:txBody>
@@ -4652,8 +4652,8 @@
         </p:nvSpPr>
         <p:spPr>
           <a:xfrm>
-            <a:off x="6291072" y="1243584"/>
-            <a:ext cx="2514600" cy="603504"/>
+            <a:off x="6291072" y="1207008"/>
+            <a:ext cx="2514600" cy="731520"/>
           </a:xfrm>
           <a:prstGeom prst="rect">
             <a:avLst/>
@@ -4731,8 +4731,8 @@
         </p:nvSpPr>
         <p:spPr>
           <a:xfrm>
-            <a:off x="6291072" y="1883664"/>
-            <a:ext cx="2514600" cy="950976"/>
+            <a:off x="6291072" y="1938528"/>
+            <a:ext cx="2514600" cy="914400"/>
           </a:xfrm>
           <a:prstGeom prst="rect">
             <a:avLst/>
@@ -4827,8 +4827,8 @@
         </p:nvSpPr>
         <p:spPr>
           <a:xfrm>
-            <a:off x="6291072" y="2834640"/>
-            <a:ext cx="2514600" cy="950976"/>
+            <a:off x="6291072" y="2852928"/>
+            <a:ext cx="2514600" cy="914400"/>
           </a:xfrm>
           <a:prstGeom prst="rect">
             <a:avLst/>
@@ -4906,8 +4906,8 @@
         </p:nvSpPr>
         <p:spPr>
           <a:xfrm>
-            <a:off x="6291072" y="3785616"/>
-            <a:ext cx="2514600" cy="950976"/>
+            <a:off x="6291072" y="3767328"/>
+            <a:ext cx="2514600" cy="914400"/>
           </a:xfrm>
           <a:prstGeom prst="rect">
             <a:avLst/>
@@ -5038,8 +5038,8 @@
         </p:nvSpPr>
         <p:spPr>
           <a:xfrm>
-            <a:off x="9189720" y="1243584"/>
-            <a:ext cx="2514600" cy="603504"/>
+            <a:off x="9189720" y="1207008"/>
+            <a:ext cx="2514600" cy="731520"/>
           </a:xfrm>
           <a:prstGeom prst="rect">
             <a:avLst/>
@@ -5117,8 +5117,8 @@
         </p:nvSpPr>
         <p:spPr>
           <a:xfrm>
-            <a:off x="9189720" y="1883664"/>
-            <a:ext cx="2514600" cy="950976"/>
+            <a:off x="9189720" y="1938528"/>
+            <a:ext cx="2514600" cy="914400"/>
           </a:xfrm>
           <a:prstGeom prst="rect">
             <a:avLst/>
@@ -5196,8 +5196,8 @@
         </p:nvSpPr>
         <p:spPr>
           <a:xfrm>
-            <a:off x="9189720" y="2834640"/>
-            <a:ext cx="2514600" cy="950976"/>
+            <a:off x="9189720" y="2852928"/>
+            <a:ext cx="2514600" cy="914400"/>
           </a:xfrm>
           <a:prstGeom prst="rect">
             <a:avLst/>
@@ -5292,8 +5292,8 @@
         </p:nvSpPr>
         <p:spPr>
           <a:xfrm>
-            <a:off x="9189720" y="3785616"/>
-            <a:ext cx="2514600" cy="950976"/>
+            <a:off x="9189720" y="3767328"/>
+            <a:ext cx="2514600" cy="914400"/>
           </a:xfrm>
           <a:prstGeom prst="rect">
             <a:avLst/>
@@ -5358,7 +5358,7 @@
                 <a:latin typeface="Malgun Gothic"/>
                 <a:ea typeface="Malgun Gothic"/>
               </a:rPr>
-              <a:t>전역·LLE·열화를</a:t>
+              <a:t>LLE, aging 등을</a:t>
             </a:r>
           </a:p>
           <a:p>
@@ -5375,7 +5375,7 @@
                 <a:latin typeface="Malgun Gothic"/>
                 <a:ea typeface="Malgun Gothic"/>
               </a:rPr>
-              <a:t>하나의 식으로 처리</a:t>
+              <a:t>개별 TR charac 없이 처리</a:t>
             </a:r>
           </a:p>
         </p:txBody>
@@ -5388,7 +5388,7 @@
         </p:nvSpPr>
         <p:spPr>
           <a:xfrm>
-            <a:off x="493776" y="5047488"/>
+            <a:off x="493776" y="4956048"/>
             <a:ext cx="11210544" cy="1005840"/>
           </a:xfrm>
           <a:prstGeom prst="rect">
@@ -5454,7 +5454,7 @@
                 <a:latin typeface="Malgun Gothic"/>
                 <a:ea typeface="Malgun Gothic"/>
               </a:rPr>
-              <a:t>개별 TR 특성화 시뮬레이션 추가 없음. LLE, 전역 파라미터 이동, 열화가 Δp(i, p)만 바꾸어 같은 경로로 들어온다.</a:t>
+              <a:t>global variation은 모든 TR에 같은 Δp를 준다. TR별 몫을 알면 TR마다 Δp가 다른 LLE와 aging으로 그대로 확장된다.</a:t>
             </a:r>
           </a:p>
         </p:txBody>
@@ -5467,7 +5467,7 @@
         </p:nvSpPr>
         <p:spPr>
           <a:xfrm>
-            <a:off x="493776" y="6254496"/>
+            <a:off x="493776" y="6163056"/>
             <a:ext cx="11210544" cy="274320"/>
           </a:xfrm>
           <a:prstGeom prst="rect">
@@ -6946,7 +6946,7 @@
                 <a:latin typeface="Malgun Gothic"/>
                 <a:ea typeface="Malgun Gothic"/>
               </a:rPr>
-              <a:t>집합값은 기여도를 곱해야 TR 단위가 된다</a:t>
+              <a:t>집합 변화량에 기여도를 곱하면 TR별 몫이 나온다</a:t>
             </a:r>
           </a:p>
         </p:txBody>
@@ -6986,7 +6986,7 @@
                 <a:latin typeface="Malgun Gothic"/>
                 <a:ea typeface="Malgun Gothic"/>
               </a:rPr>
-              <a:t>USM 값은 셀 전체를 동시에 섭동한 결과라 TR 식별 정보가 없다. LLE DM은 TR별 Δp를 주는데 받을 상대가 없다.</a:t>
+              <a:t>USM은 셀 전체를 함께 흔든 결과라 TR 식별 정보가 없다. 기여도가 각 TR이 global variation에서 차지하는 몫을 결정한다.</a:t>
             </a:r>
           </a:p>
         </p:txBody>
@@ -7319,7 +7319,7 @@
                 <a:latin typeface="Malgun Gothic"/>
                 <a:ea typeface="Malgun Gothic"/>
               </a:rPr>
-              <a:t>USM 값 S_agg(p)는 셀 전체의 합이다. LLE DM이 만든 TR별 Δp를 곱할 TR별 상대가 없다.</a:t>
+              <a:t>USM 값 S_agg(p)는 셀 전체의 합이다. 어느 TR이 얼마를 차지하는지가 라이브러리에 없다.</a:t>
             </a:r>
           </a:p>
         </p:txBody>
@@ -7381,7 +7381,7 @@
                 <a:latin typeface="Malgun Gothic"/>
                 <a:ea typeface="Malgun Gothic"/>
               </a:rPr>
-              <a:t>환산</a:t>
+              <a:t>예측</a:t>
             </a:r>
           </a:p>
         </p:txBody>
@@ -7443,7 +7443,7 @@
                 <a:latin typeface="Consolas"/>
                 <a:ea typeface="Malgun Gothic"/>
               </a:rPr>
-              <a:t>S_rec(i, p) = C(i ; s,l) · S_agg(p ; s,l)</a:t>
+              <a:t>S(i, p) = C(i ; s,l) · S_agg(p ; s,l)</a:t>
             </a:r>
           </a:p>
         </p:txBody>
@@ -7607,7 +7607,7 @@
                 <a:latin typeface="Malgun Gothic"/>
                 <a:ea typeface="Malgun Gothic"/>
               </a:rPr>
-              <a:t>환산 정확도 — 그룹 동시 섭동으로 얻은 직접 민감도 대비 (3σ, 지연 대비 %)</a:t>
+              <a:t>예측 정확도 — 그룹 동시 섭동으로 얻은 직접 민감도 대비 (3σ, 지연 대비 %)</a:t>
             </a:r>
           </a:p>
         </p:txBody>
@@ -8305,7 +8305,7 @@
                 <a:latin typeface="Malgun Gothic"/>
                 <a:ea typeface="Malgun Gothic"/>
               </a:rPr>
-              <a:t>환산이 정합성 조건을 만족하므로, 모든 TR을 같은 양으로 움직이면 집합값이 그대로 복구된다.</a:t>
+              <a:t>모든 TR을 같은 양으로 움직이면 집합값이 그대로 복구되므로, 예측된 TR별 몫은 서로 모순되지 않는다.</a:t>
             </a:r>
           </a:p>
           <a:p>
@@ -9477,7 +9477,7 @@
                           <a:latin typeface="Malgun Gothic"/>
                           <a:ea typeface="Malgun Gothic"/>
                         </a:rPr>
-                        <a:t>기여도로 집합값을 환산</a:t>
+                        <a:t>기여도로 TR별 몫을 예측</a:t>
                       </a:r>
                     </a:p>
                   </a:txBody>
@@ -10213,7 +10213,7 @@
                           <a:latin typeface="Malgun Gothic"/>
                           <a:ea typeface="Malgun Gothic"/>
                         </a:rPr>
-                        <a:t>추가 특성화</a:t>
+                        <a:t>Δp 분포</a:t>
                       </a:r>
                     </a:p>
                   </a:txBody>
@@ -10265,7 +10265,7 @@
                           <a:latin typeface="Malgun Gothic"/>
                           <a:ea typeface="Malgun Gothic"/>
                         </a:rPr>
-                        <a:t>기여도 재사용</a:t>
+                        <a:t>추가 특성화</a:t>
                       </a:r>
                     </a:p>
                   </a:txBody>
@@ -10423,7 +10423,7 @@
                           <a:latin typeface="Malgun Gothic"/>
                           <a:ea typeface="Malgun Gothic"/>
                         </a:rPr>
-                        <a:t>없음</a:t>
+                        <a:t>TR마다 다름</a:t>
                       </a:r>
                     </a:p>
                   </a:txBody>
@@ -10475,7 +10475,427 @@
                           <a:latin typeface="Malgun Gothic"/>
                           <a:ea typeface="Malgun Gothic"/>
                         </a:rPr>
-                        <a:t>그대로</a:t>
+                        <a:t>없음</a:t>
+                      </a:r>
+                    </a:p>
+                  </a:txBody>
+                  <a:tcPr marL="73152" marR="73152" marT="27432" marB="27432" anchor="ctr">
+                    <a:lnL w="9525" cap="flat" cmpd="sng" algn="ctr">
+                      <a:solidFill>
+                        <a:srgbClr val="808080"/>
+                      </a:solidFill>
+                      <a:prstDash val="solid"/>
+                    </a:lnL>
+                    <a:lnR w="9525" cap="flat" cmpd="sng" algn="ctr">
+                      <a:solidFill>
+                        <a:srgbClr val="808080"/>
+                      </a:solidFill>
+                      <a:prstDash val="solid"/>
+                    </a:lnR>
+                    <a:lnT w="9525" cap="flat" cmpd="sng" algn="ctr">
+                      <a:solidFill>
+                        <a:srgbClr val="808080"/>
+                      </a:solidFill>
+                      <a:prstDash val="solid"/>
+                    </a:lnT>
+                    <a:lnB w="9525" cap="flat" cmpd="sng" algn="ctr">
+                      <a:solidFill>
+                        <a:srgbClr val="808080"/>
+                      </a:solidFill>
+                      <a:prstDash val="solid"/>
+                    </a:lnB>
+                    <a:solidFill>
+                      <a:srgbClr val="FFFFFF"/>
+                    </a:solidFill>
+                  </a:tcPr>
+                </a:tc>
+              </a:tr>
+              <a:tr h="438912">
+                <a:tc>
+                  <a:txBody>
+                    <a:bodyPr/>
+                    <a:lstStyle/>
+                    <a:p>
+                      <a:pPr algn="l">
+                        <a:spcAft>
+                          <a:spcPts val="0"/>
+                        </a:spcAft>
+                      </a:pPr>
+                      <a:r>
+                        <a:rPr sz="950" b="0">
+                          <a:solidFill>
+                            <a:srgbClr val="262626"/>
+                          </a:solidFill>
+                          <a:latin typeface="Malgun Gothic"/>
+                          <a:ea typeface="Malgun Gothic"/>
+                        </a:rPr>
+                        <a:t>경년 열화 (aging, BTI)</a:t>
+                      </a:r>
+                    </a:p>
+                  </a:txBody>
+                  <a:tcPr marL="73152" marR="73152" marT="27432" marB="27432" anchor="ctr">
+                    <a:lnL w="9525" cap="flat" cmpd="sng" algn="ctr">
+                      <a:solidFill>
+                        <a:srgbClr val="808080"/>
+                      </a:solidFill>
+                      <a:prstDash val="solid"/>
+                    </a:lnL>
+                    <a:lnR w="9525" cap="flat" cmpd="sng" algn="ctr">
+                      <a:solidFill>
+                        <a:srgbClr val="808080"/>
+                      </a:solidFill>
+                      <a:prstDash val="solid"/>
+                    </a:lnR>
+                    <a:lnT w="9525" cap="flat" cmpd="sng" algn="ctr">
+                      <a:solidFill>
+                        <a:srgbClr val="808080"/>
+                      </a:solidFill>
+                      <a:prstDash val="solid"/>
+                    </a:lnT>
+                    <a:lnB w="9525" cap="flat" cmpd="sng" algn="ctr">
+                      <a:solidFill>
+                        <a:srgbClr val="808080"/>
+                      </a:solidFill>
+                      <a:prstDash val="solid"/>
+                    </a:lnB>
+                    <a:solidFill>
+                      <a:srgbClr val="F2F2F2"/>
+                    </a:solidFill>
+                  </a:tcPr>
+                </a:tc>
+                <a:tc>
+                  <a:txBody>
+                    <a:bodyPr/>
+                    <a:lstStyle/>
+                    <a:p>
+                      <a:pPr algn="ctr">
+                        <a:spcAft>
+                          <a:spcPts val="0"/>
+                        </a:spcAft>
+                      </a:pPr>
+                      <a:r>
+                        <a:rPr sz="950" b="0">
+                          <a:solidFill>
+                            <a:srgbClr val="262626"/>
+                          </a:solidFill>
+                          <a:latin typeface="Malgun Gothic"/>
+                          <a:ea typeface="Malgun Gothic"/>
+                        </a:rPr>
+                        <a:t>열화 모델  ΔVth(t), 스트레스 이력</a:t>
+                      </a:r>
+                    </a:p>
+                  </a:txBody>
+                  <a:tcPr marL="73152" marR="73152" marT="27432" marB="27432" anchor="ctr">
+                    <a:lnL w="9525" cap="flat" cmpd="sng" algn="ctr">
+                      <a:solidFill>
+                        <a:srgbClr val="808080"/>
+                      </a:solidFill>
+                      <a:prstDash val="solid"/>
+                    </a:lnL>
+                    <a:lnR w="9525" cap="flat" cmpd="sng" algn="ctr">
+                      <a:solidFill>
+                        <a:srgbClr val="808080"/>
+                      </a:solidFill>
+                      <a:prstDash val="solid"/>
+                    </a:lnR>
+                    <a:lnT w="9525" cap="flat" cmpd="sng" algn="ctr">
+                      <a:solidFill>
+                        <a:srgbClr val="808080"/>
+                      </a:solidFill>
+                      <a:prstDash val="solid"/>
+                    </a:lnT>
+                    <a:lnB w="9525" cap="flat" cmpd="sng" algn="ctr">
+                      <a:solidFill>
+                        <a:srgbClr val="808080"/>
+                      </a:solidFill>
+                      <a:prstDash val="solid"/>
+                    </a:lnB>
+                    <a:solidFill>
+                      <a:srgbClr val="F2F2F2"/>
+                    </a:solidFill>
+                  </a:tcPr>
+                </a:tc>
+                <a:tc>
+                  <a:txBody>
+                    <a:bodyPr/>
+                    <a:lstStyle/>
+                    <a:p>
+                      <a:pPr algn="ctr">
+                        <a:spcAft>
+                          <a:spcPts val="0"/>
+                        </a:spcAft>
+                      </a:pPr>
+                      <a:r>
+                        <a:rPr sz="950" b="0">
+                          <a:solidFill>
+                            <a:srgbClr val="262626"/>
+                          </a:solidFill>
+                          <a:latin typeface="Malgun Gothic"/>
+                          <a:ea typeface="Malgun Gothic"/>
+                        </a:rPr>
+                        <a:t>TR마다 다름</a:t>
+                      </a:r>
+                    </a:p>
+                  </a:txBody>
+                  <a:tcPr marL="73152" marR="73152" marT="27432" marB="27432" anchor="ctr">
+                    <a:lnL w="9525" cap="flat" cmpd="sng" algn="ctr">
+                      <a:solidFill>
+                        <a:srgbClr val="808080"/>
+                      </a:solidFill>
+                      <a:prstDash val="solid"/>
+                    </a:lnL>
+                    <a:lnR w="9525" cap="flat" cmpd="sng" algn="ctr">
+                      <a:solidFill>
+                        <a:srgbClr val="808080"/>
+                      </a:solidFill>
+                      <a:prstDash val="solid"/>
+                    </a:lnR>
+                    <a:lnT w="9525" cap="flat" cmpd="sng" algn="ctr">
+                      <a:solidFill>
+                        <a:srgbClr val="808080"/>
+                      </a:solidFill>
+                      <a:prstDash val="solid"/>
+                    </a:lnT>
+                    <a:lnB w="9525" cap="flat" cmpd="sng" algn="ctr">
+                      <a:solidFill>
+                        <a:srgbClr val="808080"/>
+                      </a:solidFill>
+                      <a:prstDash val="solid"/>
+                    </a:lnB>
+                    <a:solidFill>
+                      <a:srgbClr val="F2F2F2"/>
+                    </a:solidFill>
+                  </a:tcPr>
+                </a:tc>
+                <a:tc>
+                  <a:txBody>
+                    <a:bodyPr/>
+                    <a:lstStyle/>
+                    <a:p>
+                      <a:pPr algn="ctr">
+                        <a:spcAft>
+                          <a:spcPts val="0"/>
+                        </a:spcAft>
+                      </a:pPr>
+                      <a:r>
+                        <a:rPr sz="950" b="0">
+                          <a:solidFill>
+                            <a:srgbClr val="262626"/>
+                          </a:solidFill>
+                          <a:latin typeface="Malgun Gothic"/>
+                          <a:ea typeface="Malgun Gothic"/>
+                        </a:rPr>
+                        <a:t>없음</a:t>
+                      </a:r>
+                    </a:p>
+                  </a:txBody>
+                  <a:tcPr marL="73152" marR="73152" marT="27432" marB="27432" anchor="ctr">
+                    <a:lnL w="9525" cap="flat" cmpd="sng" algn="ctr">
+                      <a:solidFill>
+                        <a:srgbClr val="808080"/>
+                      </a:solidFill>
+                      <a:prstDash val="solid"/>
+                    </a:lnL>
+                    <a:lnR w="9525" cap="flat" cmpd="sng" algn="ctr">
+                      <a:solidFill>
+                        <a:srgbClr val="808080"/>
+                      </a:solidFill>
+                      <a:prstDash val="solid"/>
+                    </a:lnR>
+                    <a:lnT w="9525" cap="flat" cmpd="sng" algn="ctr">
+                      <a:solidFill>
+                        <a:srgbClr val="808080"/>
+                      </a:solidFill>
+                      <a:prstDash val="solid"/>
+                    </a:lnT>
+                    <a:lnB w="9525" cap="flat" cmpd="sng" algn="ctr">
+                      <a:solidFill>
+                        <a:srgbClr val="808080"/>
+                      </a:solidFill>
+                      <a:prstDash val="solid"/>
+                    </a:lnB>
+                    <a:solidFill>
+                      <a:srgbClr val="F2F2F2"/>
+                    </a:solidFill>
+                  </a:tcPr>
+                </a:tc>
+              </a:tr>
+              <a:tr h="438912">
+                <a:tc>
+                  <a:txBody>
+                    <a:bodyPr/>
+                    <a:lstStyle/>
+                    <a:p>
+                      <a:pPr algn="l">
+                        <a:spcAft>
+                          <a:spcPts val="0"/>
+                        </a:spcAft>
+                      </a:pPr>
+                      <a:r>
+                        <a:rPr sz="950" b="0">
+                          <a:solidFill>
+                            <a:srgbClr val="262626"/>
+                          </a:solidFill>
+                          <a:latin typeface="Malgun Gothic"/>
+                          <a:ea typeface="Malgun Gothic"/>
+                        </a:rPr>
+                        <a:t>응력 / WPE</a:t>
+                      </a:r>
+                    </a:p>
+                  </a:txBody>
+                  <a:tcPr marL="73152" marR="73152" marT="27432" marB="27432" anchor="ctr">
+                    <a:lnL w="9525" cap="flat" cmpd="sng" algn="ctr">
+                      <a:solidFill>
+                        <a:srgbClr val="808080"/>
+                      </a:solidFill>
+                      <a:prstDash val="solid"/>
+                    </a:lnL>
+                    <a:lnR w="9525" cap="flat" cmpd="sng" algn="ctr">
+                      <a:solidFill>
+                        <a:srgbClr val="808080"/>
+                      </a:solidFill>
+                      <a:prstDash val="solid"/>
+                    </a:lnR>
+                    <a:lnT w="9525" cap="flat" cmpd="sng" algn="ctr">
+                      <a:solidFill>
+                        <a:srgbClr val="808080"/>
+                      </a:solidFill>
+                      <a:prstDash val="solid"/>
+                    </a:lnT>
+                    <a:lnB w="9525" cap="flat" cmpd="sng" algn="ctr">
+                      <a:solidFill>
+                        <a:srgbClr val="808080"/>
+                      </a:solidFill>
+                      <a:prstDash val="solid"/>
+                    </a:lnB>
+                    <a:solidFill>
+                      <a:srgbClr val="FFFFFF"/>
+                    </a:solidFill>
+                  </a:tcPr>
+                </a:tc>
+                <a:tc>
+                  <a:txBody>
+                    <a:bodyPr/>
+                    <a:lstStyle/>
+                    <a:p>
+                      <a:pPr algn="ctr">
+                        <a:spcAft>
+                          <a:spcPts val="0"/>
+                        </a:spcAft>
+                      </a:pPr>
+                      <a:r>
+                        <a:rPr sz="950" b="0">
+                          <a:solidFill>
+                            <a:srgbClr val="262626"/>
+                          </a:solidFill>
+                          <a:latin typeface="Malgun Gothic"/>
+                          <a:ea typeface="Malgun Gothic"/>
+                        </a:rPr>
+                        <a:t>레이아웃 컨텍스트</a:t>
+                      </a:r>
+                    </a:p>
+                  </a:txBody>
+                  <a:tcPr marL="73152" marR="73152" marT="27432" marB="27432" anchor="ctr">
+                    <a:lnL w="9525" cap="flat" cmpd="sng" algn="ctr">
+                      <a:solidFill>
+                        <a:srgbClr val="808080"/>
+                      </a:solidFill>
+                      <a:prstDash val="solid"/>
+                    </a:lnL>
+                    <a:lnR w="9525" cap="flat" cmpd="sng" algn="ctr">
+                      <a:solidFill>
+                        <a:srgbClr val="808080"/>
+                      </a:solidFill>
+                      <a:prstDash val="solid"/>
+                    </a:lnR>
+                    <a:lnT w="9525" cap="flat" cmpd="sng" algn="ctr">
+                      <a:solidFill>
+                        <a:srgbClr val="808080"/>
+                      </a:solidFill>
+                      <a:prstDash val="solid"/>
+                    </a:lnT>
+                    <a:lnB w="9525" cap="flat" cmpd="sng" algn="ctr">
+                      <a:solidFill>
+                        <a:srgbClr val="808080"/>
+                      </a:solidFill>
+                      <a:prstDash val="solid"/>
+                    </a:lnB>
+                    <a:solidFill>
+                      <a:srgbClr val="FFFFFF"/>
+                    </a:solidFill>
+                  </a:tcPr>
+                </a:tc>
+                <a:tc>
+                  <a:txBody>
+                    <a:bodyPr/>
+                    <a:lstStyle/>
+                    <a:p>
+                      <a:pPr algn="ctr">
+                        <a:spcAft>
+                          <a:spcPts val="0"/>
+                        </a:spcAft>
+                      </a:pPr>
+                      <a:r>
+                        <a:rPr sz="950" b="0">
+                          <a:solidFill>
+                            <a:srgbClr val="262626"/>
+                          </a:solidFill>
+                          <a:latin typeface="Malgun Gothic"/>
+                          <a:ea typeface="Malgun Gothic"/>
+                        </a:rPr>
+                        <a:t>TR마다 다름</a:t>
+                      </a:r>
+                    </a:p>
+                  </a:txBody>
+                  <a:tcPr marL="73152" marR="73152" marT="27432" marB="27432" anchor="ctr">
+                    <a:lnL w="9525" cap="flat" cmpd="sng" algn="ctr">
+                      <a:solidFill>
+                        <a:srgbClr val="808080"/>
+                      </a:solidFill>
+                      <a:prstDash val="solid"/>
+                    </a:lnL>
+                    <a:lnR w="9525" cap="flat" cmpd="sng" algn="ctr">
+                      <a:solidFill>
+                        <a:srgbClr val="808080"/>
+                      </a:solidFill>
+                      <a:prstDash val="solid"/>
+                    </a:lnR>
+                    <a:lnT w="9525" cap="flat" cmpd="sng" algn="ctr">
+                      <a:solidFill>
+                        <a:srgbClr val="808080"/>
+                      </a:solidFill>
+                      <a:prstDash val="solid"/>
+                    </a:lnT>
+                    <a:lnB w="9525" cap="flat" cmpd="sng" algn="ctr">
+                      <a:solidFill>
+                        <a:srgbClr val="808080"/>
+                      </a:solidFill>
+                      <a:prstDash val="solid"/>
+                    </a:lnB>
+                    <a:solidFill>
+                      <a:srgbClr val="FFFFFF"/>
+                    </a:solidFill>
+                  </a:tcPr>
+                </a:tc>
+                <a:tc>
+                  <a:txBody>
+                    <a:bodyPr/>
+                    <a:lstStyle/>
+                    <a:p>
+                      <a:pPr algn="ctr">
+                        <a:spcAft>
+                          <a:spcPts val="0"/>
+                        </a:spcAft>
+                      </a:pPr>
+                      <a:r>
+                        <a:rPr sz="950" b="0">
+                          <a:solidFill>
+                            <a:srgbClr val="262626"/>
+                          </a:solidFill>
+                          <a:latin typeface="Malgun Gothic"/>
+                          <a:ea typeface="Malgun Gothic"/>
+                        </a:rPr>
+                        <a:t>없음</a:t>
                       </a:r>
                     </a:p>
                   </a:txBody>
@@ -10633,375 +11053,7 @@
                           <a:latin typeface="Malgun Gothic"/>
                           <a:ea typeface="Malgun Gothic"/>
                         </a:rPr>
-                        <a:t>없음</a:t>
-                      </a:r>
-                    </a:p>
-                  </a:txBody>
-                  <a:tcPr marL="73152" marR="73152" marT="27432" marB="27432" anchor="ctr">
-                    <a:lnL w="9525" cap="flat" cmpd="sng" algn="ctr">
-                      <a:solidFill>
-                        <a:srgbClr val="808080"/>
-                      </a:solidFill>
-                      <a:prstDash val="solid"/>
-                    </a:lnL>
-                    <a:lnR w="9525" cap="flat" cmpd="sng" algn="ctr">
-                      <a:solidFill>
-                        <a:srgbClr val="808080"/>
-                      </a:solidFill>
-                      <a:prstDash val="solid"/>
-                    </a:lnR>
-                    <a:lnT w="9525" cap="flat" cmpd="sng" algn="ctr">
-                      <a:solidFill>
-                        <a:srgbClr val="808080"/>
-                      </a:solidFill>
-                      <a:prstDash val="solid"/>
-                    </a:lnT>
-                    <a:lnB w="9525" cap="flat" cmpd="sng" algn="ctr">
-                      <a:solidFill>
-                        <a:srgbClr val="808080"/>
-                      </a:solidFill>
-                      <a:prstDash val="solid"/>
-                    </a:lnB>
-                    <a:solidFill>
-                      <a:srgbClr val="F2F2F2"/>
-                    </a:solidFill>
-                  </a:tcPr>
-                </a:tc>
-                <a:tc>
-                  <a:txBody>
-                    <a:bodyPr/>
-                    <a:lstStyle/>
-                    <a:p>
-                      <a:pPr algn="ctr">
-                        <a:spcAft>
-                          <a:spcPts val="0"/>
-                        </a:spcAft>
-                      </a:pPr>
-                      <a:r>
-                        <a:rPr sz="950" b="0">
-                          <a:solidFill>
-                            <a:srgbClr val="262626"/>
-                          </a:solidFill>
-                          <a:latin typeface="Malgun Gothic"/>
-                          <a:ea typeface="Malgun Gothic"/>
-                        </a:rPr>
-                        <a:t>그대로</a:t>
-                      </a:r>
-                    </a:p>
-                  </a:txBody>
-                  <a:tcPr marL="73152" marR="73152" marT="27432" marB="27432" anchor="ctr">
-                    <a:lnL w="9525" cap="flat" cmpd="sng" algn="ctr">
-                      <a:solidFill>
-                        <a:srgbClr val="808080"/>
-                      </a:solidFill>
-                      <a:prstDash val="solid"/>
-                    </a:lnL>
-                    <a:lnR w="9525" cap="flat" cmpd="sng" algn="ctr">
-                      <a:solidFill>
-                        <a:srgbClr val="808080"/>
-                      </a:solidFill>
-                      <a:prstDash val="solid"/>
-                    </a:lnR>
-                    <a:lnT w="9525" cap="flat" cmpd="sng" algn="ctr">
-                      <a:solidFill>
-                        <a:srgbClr val="808080"/>
-                      </a:solidFill>
-                      <a:prstDash val="solid"/>
-                    </a:lnT>
-                    <a:lnB w="9525" cap="flat" cmpd="sng" algn="ctr">
-                      <a:solidFill>
-                        <a:srgbClr val="808080"/>
-                      </a:solidFill>
-                      <a:prstDash val="solid"/>
-                    </a:lnB>
-                    <a:solidFill>
-                      <a:srgbClr val="F2F2F2"/>
-                    </a:solidFill>
-                  </a:tcPr>
-                </a:tc>
-              </a:tr>
-              <a:tr h="438912">
-                <a:tc>
-                  <a:txBody>
-                    <a:bodyPr/>
-                    <a:lstStyle/>
-                    <a:p>
-                      <a:pPr algn="l">
-                        <a:spcAft>
-                          <a:spcPts val="0"/>
-                        </a:spcAft>
-                      </a:pPr>
-                      <a:r>
-                        <a:rPr sz="950" b="0">
-                          <a:solidFill>
-                            <a:srgbClr val="262626"/>
-                          </a:solidFill>
-                          <a:latin typeface="Malgun Gothic"/>
-                          <a:ea typeface="Malgun Gothic"/>
-                        </a:rPr>
-                        <a:t>경년 열화 (BTI)</a:t>
-                      </a:r>
-                    </a:p>
-                  </a:txBody>
-                  <a:tcPr marL="73152" marR="73152" marT="27432" marB="27432" anchor="ctr">
-                    <a:lnL w="9525" cap="flat" cmpd="sng" algn="ctr">
-                      <a:solidFill>
-                        <a:srgbClr val="808080"/>
-                      </a:solidFill>
-                      <a:prstDash val="solid"/>
-                    </a:lnL>
-                    <a:lnR w="9525" cap="flat" cmpd="sng" algn="ctr">
-                      <a:solidFill>
-                        <a:srgbClr val="808080"/>
-                      </a:solidFill>
-                      <a:prstDash val="solid"/>
-                    </a:lnR>
-                    <a:lnT w="9525" cap="flat" cmpd="sng" algn="ctr">
-                      <a:solidFill>
-                        <a:srgbClr val="808080"/>
-                      </a:solidFill>
-                      <a:prstDash val="solid"/>
-                    </a:lnT>
-                    <a:lnB w="9525" cap="flat" cmpd="sng" algn="ctr">
-                      <a:solidFill>
-                        <a:srgbClr val="808080"/>
-                      </a:solidFill>
-                      <a:prstDash val="solid"/>
-                    </a:lnB>
-                    <a:solidFill>
-                      <a:srgbClr val="FFFFFF"/>
-                    </a:solidFill>
-                  </a:tcPr>
-                </a:tc>
-                <a:tc>
-                  <a:txBody>
-                    <a:bodyPr/>
-                    <a:lstStyle/>
-                    <a:p>
-                      <a:pPr algn="ctr">
-                        <a:spcAft>
-                          <a:spcPts val="0"/>
-                        </a:spcAft>
-                      </a:pPr>
-                      <a:r>
-                        <a:rPr sz="950" b="0">
-                          <a:solidFill>
-                            <a:srgbClr val="262626"/>
-                          </a:solidFill>
-                          <a:latin typeface="Malgun Gothic"/>
-                          <a:ea typeface="Malgun Gothic"/>
-                        </a:rPr>
-                        <a:t>열화 모델  ΔVth(t)</a:t>
-                      </a:r>
-                    </a:p>
-                  </a:txBody>
-                  <a:tcPr marL="73152" marR="73152" marT="27432" marB="27432" anchor="ctr">
-                    <a:lnL w="9525" cap="flat" cmpd="sng" algn="ctr">
-                      <a:solidFill>
-                        <a:srgbClr val="808080"/>
-                      </a:solidFill>
-                      <a:prstDash val="solid"/>
-                    </a:lnL>
-                    <a:lnR w="9525" cap="flat" cmpd="sng" algn="ctr">
-                      <a:solidFill>
-                        <a:srgbClr val="808080"/>
-                      </a:solidFill>
-                      <a:prstDash val="solid"/>
-                    </a:lnR>
-                    <a:lnT w="9525" cap="flat" cmpd="sng" algn="ctr">
-                      <a:solidFill>
-                        <a:srgbClr val="808080"/>
-                      </a:solidFill>
-                      <a:prstDash val="solid"/>
-                    </a:lnT>
-                    <a:lnB w="9525" cap="flat" cmpd="sng" algn="ctr">
-                      <a:solidFill>
-                        <a:srgbClr val="808080"/>
-                      </a:solidFill>
-                      <a:prstDash val="solid"/>
-                    </a:lnB>
-                    <a:solidFill>
-                      <a:srgbClr val="FFFFFF"/>
-                    </a:solidFill>
-                  </a:tcPr>
-                </a:tc>
-                <a:tc>
-                  <a:txBody>
-                    <a:bodyPr/>
-                    <a:lstStyle/>
-                    <a:p>
-                      <a:pPr algn="ctr">
-                        <a:spcAft>
-                          <a:spcPts val="0"/>
-                        </a:spcAft>
-                      </a:pPr>
-                      <a:r>
-                        <a:rPr sz="950" b="0">
-                          <a:solidFill>
-                            <a:srgbClr val="262626"/>
-                          </a:solidFill>
-                          <a:latin typeface="Malgun Gothic"/>
-                          <a:ea typeface="Malgun Gothic"/>
-                        </a:rPr>
-                        <a:t>없음</a:t>
-                      </a:r>
-                    </a:p>
-                  </a:txBody>
-                  <a:tcPr marL="73152" marR="73152" marT="27432" marB="27432" anchor="ctr">
-                    <a:lnL w="9525" cap="flat" cmpd="sng" algn="ctr">
-                      <a:solidFill>
-                        <a:srgbClr val="808080"/>
-                      </a:solidFill>
-                      <a:prstDash val="solid"/>
-                    </a:lnL>
-                    <a:lnR w="9525" cap="flat" cmpd="sng" algn="ctr">
-                      <a:solidFill>
-                        <a:srgbClr val="808080"/>
-                      </a:solidFill>
-                      <a:prstDash val="solid"/>
-                    </a:lnR>
-                    <a:lnT w="9525" cap="flat" cmpd="sng" algn="ctr">
-                      <a:solidFill>
-                        <a:srgbClr val="808080"/>
-                      </a:solidFill>
-                      <a:prstDash val="solid"/>
-                    </a:lnT>
-                    <a:lnB w="9525" cap="flat" cmpd="sng" algn="ctr">
-                      <a:solidFill>
-                        <a:srgbClr val="808080"/>
-                      </a:solidFill>
-                      <a:prstDash val="solid"/>
-                    </a:lnB>
-                    <a:solidFill>
-                      <a:srgbClr val="FFFFFF"/>
-                    </a:solidFill>
-                  </a:tcPr>
-                </a:tc>
-                <a:tc>
-                  <a:txBody>
-                    <a:bodyPr/>
-                    <a:lstStyle/>
-                    <a:p>
-                      <a:pPr algn="ctr">
-                        <a:spcAft>
-                          <a:spcPts val="0"/>
-                        </a:spcAft>
-                      </a:pPr>
-                      <a:r>
-                        <a:rPr sz="950" b="0">
-                          <a:solidFill>
-                            <a:srgbClr val="262626"/>
-                          </a:solidFill>
-                          <a:latin typeface="Malgun Gothic"/>
-                          <a:ea typeface="Malgun Gothic"/>
-                        </a:rPr>
-                        <a:t>그대로</a:t>
-                      </a:r>
-                    </a:p>
-                  </a:txBody>
-                  <a:tcPr marL="73152" marR="73152" marT="27432" marB="27432" anchor="ctr">
-                    <a:lnL w="9525" cap="flat" cmpd="sng" algn="ctr">
-                      <a:solidFill>
-                        <a:srgbClr val="808080"/>
-                      </a:solidFill>
-                      <a:prstDash val="solid"/>
-                    </a:lnL>
-                    <a:lnR w="9525" cap="flat" cmpd="sng" algn="ctr">
-                      <a:solidFill>
-                        <a:srgbClr val="808080"/>
-                      </a:solidFill>
-                      <a:prstDash val="solid"/>
-                    </a:lnR>
-                    <a:lnT w="9525" cap="flat" cmpd="sng" algn="ctr">
-                      <a:solidFill>
-                        <a:srgbClr val="808080"/>
-                      </a:solidFill>
-                      <a:prstDash val="solid"/>
-                    </a:lnT>
-                    <a:lnB w="9525" cap="flat" cmpd="sng" algn="ctr">
-                      <a:solidFill>
-                        <a:srgbClr val="808080"/>
-                      </a:solidFill>
-                      <a:prstDash val="solid"/>
-                    </a:lnB>
-                    <a:solidFill>
-                      <a:srgbClr val="FFFFFF"/>
-                    </a:solidFill>
-                  </a:tcPr>
-                </a:tc>
-              </a:tr>
-              <a:tr h="438912">
-                <a:tc>
-                  <a:txBody>
-                    <a:bodyPr/>
-                    <a:lstStyle/>
-                    <a:p>
-                      <a:pPr algn="l">
-                        <a:spcAft>
-                          <a:spcPts val="0"/>
-                        </a:spcAft>
-                      </a:pPr>
-                      <a:r>
-                        <a:rPr sz="950" b="0">
-                          <a:solidFill>
-                            <a:srgbClr val="262626"/>
-                          </a:solidFill>
-                          <a:latin typeface="Malgun Gothic"/>
-                          <a:ea typeface="Malgun Gothic"/>
-                        </a:rPr>
-                        <a:t>응력 / WPE</a:t>
-                      </a:r>
-                    </a:p>
-                  </a:txBody>
-                  <a:tcPr marL="73152" marR="73152" marT="27432" marB="27432" anchor="ctr">
-                    <a:lnL w="9525" cap="flat" cmpd="sng" algn="ctr">
-                      <a:solidFill>
-                        <a:srgbClr val="808080"/>
-                      </a:solidFill>
-                      <a:prstDash val="solid"/>
-                    </a:lnL>
-                    <a:lnR w="9525" cap="flat" cmpd="sng" algn="ctr">
-                      <a:solidFill>
-                        <a:srgbClr val="808080"/>
-                      </a:solidFill>
-                      <a:prstDash val="solid"/>
-                    </a:lnR>
-                    <a:lnT w="9525" cap="flat" cmpd="sng" algn="ctr">
-                      <a:solidFill>
-                        <a:srgbClr val="808080"/>
-                      </a:solidFill>
-                      <a:prstDash val="solid"/>
-                    </a:lnT>
-                    <a:lnB w="9525" cap="flat" cmpd="sng" algn="ctr">
-                      <a:solidFill>
-                        <a:srgbClr val="808080"/>
-                      </a:solidFill>
-                      <a:prstDash val="solid"/>
-                    </a:lnB>
-                    <a:solidFill>
-                      <a:srgbClr val="F2F2F2"/>
-                    </a:solidFill>
-                  </a:tcPr>
-                </a:tc>
-                <a:tc>
-                  <a:txBody>
-                    <a:bodyPr/>
-                    <a:lstStyle/>
-                    <a:p>
-                      <a:pPr algn="ctr">
-                        <a:spcAft>
-                          <a:spcPts val="0"/>
-                        </a:spcAft>
-                      </a:pPr>
-                      <a:r>
-                        <a:rPr sz="950" b="0">
-                          <a:solidFill>
-                            <a:srgbClr val="262626"/>
-                          </a:solidFill>
-                          <a:latin typeface="Malgun Gothic"/>
-                          <a:ea typeface="Malgun Gothic"/>
-                        </a:rPr>
-                        <a:t>레이아웃 컨텍스트</a:t>
+                        <a:t>모든 TR 공통</a:t>
                       </a:r>
                     </a:p>
                   </a:txBody>
@@ -11054,58 +11106,6 @@
                           <a:ea typeface="Malgun Gothic"/>
                         </a:rPr>
                         <a:t>없음</a:t>
-                      </a:r>
-                    </a:p>
-                  </a:txBody>
-                  <a:tcPr marL="73152" marR="73152" marT="27432" marB="27432" anchor="ctr">
-                    <a:lnL w="9525" cap="flat" cmpd="sng" algn="ctr">
-                      <a:solidFill>
-                        <a:srgbClr val="808080"/>
-                      </a:solidFill>
-                      <a:prstDash val="solid"/>
-                    </a:lnL>
-                    <a:lnR w="9525" cap="flat" cmpd="sng" algn="ctr">
-                      <a:solidFill>
-                        <a:srgbClr val="808080"/>
-                      </a:solidFill>
-                      <a:prstDash val="solid"/>
-                    </a:lnR>
-                    <a:lnT w="9525" cap="flat" cmpd="sng" algn="ctr">
-                      <a:solidFill>
-                        <a:srgbClr val="808080"/>
-                      </a:solidFill>
-                      <a:prstDash val="solid"/>
-                    </a:lnT>
-                    <a:lnB w="9525" cap="flat" cmpd="sng" algn="ctr">
-                      <a:solidFill>
-                        <a:srgbClr val="808080"/>
-                      </a:solidFill>
-                      <a:prstDash val="solid"/>
-                    </a:lnB>
-                    <a:solidFill>
-                      <a:srgbClr val="F2F2F2"/>
-                    </a:solidFill>
-                  </a:tcPr>
-                </a:tc>
-                <a:tc>
-                  <a:txBody>
-                    <a:bodyPr/>
-                    <a:lstStyle/>
-                    <a:p>
-                      <a:pPr algn="ctr">
-                        <a:spcAft>
-                          <a:spcPts val="0"/>
-                        </a:spcAft>
-                      </a:pPr>
-                      <a:r>
-                        <a:rPr sz="950" b="0">
-                          <a:solidFill>
-                            <a:srgbClr val="262626"/>
-                          </a:solidFill>
-                          <a:latin typeface="Malgun Gothic"/>
-                          <a:ea typeface="Malgun Gothic"/>
-                        </a:rPr>
-                        <a:t>그대로</a:t>
                       </a:r>
                     </a:p>
                   </a:txBody>

--- a/lvf_global_var/doc/slides/invention_4steps.pptx
+++ b/lvf_global_var/doc/slides/invention_4steps.pptx
@@ -5942,7 +5942,7 @@
                 <a:latin typeface="Malgun Gothic"/>
                 <a:ea typeface="Malgun Gothic"/>
               </a:rPr>
-              <a:t>부호를 유지하면 환산 오차가 더 작다</a:t>
+              <a:t>부호를 유지하면 오차가 더 작다 (ρ ≥ 0.5 그룹에 한함)</a:t>
             </a:r>
           </a:p>
           <a:p>
@@ -5976,7 +5976,7 @@
                 <a:latin typeface="Malgun Gothic"/>
                 <a:ea typeface="Malgun Gothic"/>
               </a:rPr>
-              <a:t>slew × load 격자마다 표면으로 저장</a:t>
+              <a:t>slew × load 격자, 타이밍 값 종류(지연 / 천이)마다 표면으로 저장</a:t>
             </a:r>
           </a:p>
         </p:txBody>
@@ -6844,8 +6844,8 @@
         </p:nvSpPr>
         <p:spPr>
           <a:xfrm>
-            <a:off x="493776" y="5596128"/>
-            <a:ext cx="11210544" cy="640080"/>
+            <a:off x="493776" y="5559552"/>
+            <a:ext cx="11210544" cy="868680"/>
           </a:xfrm>
           <a:prstGeom prst="rect">
             <a:avLst/>
@@ -6860,7 +6860,7 @@
           <a:p>
             <a:pPr algn="l">
               <a:spcAft>
-                <a:spcPts val="400"/>
+                <a:spcPts val="300"/>
               </a:spcAft>
             </a:pPr>
             <a:r>
@@ -6877,6 +6877,23 @@
           <a:p>
             <a:pPr algn="l">
               <a:spcAft>
+                <a:spcPts val="300"/>
+              </a:spcAft>
+            </a:pPr>
+            <a:r>
+              <a:rPr sz="1050" b="0">
+                <a:solidFill>
+                  <a:srgbClr val="262626"/>
+                </a:solidFill>
+                <a:latin typeface="Malgun Gothic"/>
+                <a:ea typeface="Malgun Gothic"/>
+              </a:rPr>
+              <a:t>따라서 파라미터 독립 기여도를 쓰려면 임계값 판정(테이블 평균 |C_vth − C_u0| ≤ 0.1)을 거쳐야 한다.</a:t>
+            </a:r>
+          </a:p>
+          <a:p>
+            <a:pPr algn="l">
+              <a:spcAft>
                 <a:spcPts val="400"/>
               </a:spcAft>
             </a:pPr>
@@ -6888,7 +6905,7 @@
                 <a:latin typeface="Malgun Gothic"/>
                 <a:ea typeface="Malgun Gothic"/>
               </a:rPr>
-              <a:t>따라서 파라미터 독립 기여도를 쓰려면 임계값 판정을 거쳐야 한다.</a:t>
+              <a:t>같은 아크라도 지연과 출력 천이의 기여도는 다르다 (M1 vth: 지연 0.834, 천이 0.546). 타이밍 값 종류별로 따로 둔다.</a:t>
             </a:r>
           </a:p>
         </p:txBody>
@@ -8021,7 +8038,7 @@
                           <a:latin typeface="Malgun Gothic"/>
                           <a:ea typeface="Malgun Gothic"/>
                         </a:rPr>
-                        <a:t>권장</a:t>
+                        <a:t>ρ ≥ 0.5 그룹 (구동 그룹 전부)</a:t>
                       </a:r>
                     </a:p>
                   </a:txBody>
@@ -8231,7 +8248,7 @@
                           <a:latin typeface="Malgun Gothic"/>
                           <a:ea typeface="Malgun Gothic"/>
                         </a:rPr>
-                        <a:t>조건부</a:t>
+                        <a:t>ρ &lt; 0.5 그룹 (비구동, 상쇄)</a:t>
                       </a:r>
                     </a:p>
                   </a:txBody>
@@ -8322,7 +8339,7 @@
                 <a:latin typeface="Malgun Gothic"/>
                 <a:ea typeface="Malgun Gothic"/>
               </a:rPr>
-              <a:t>1차 항 기준 그룹 동시 섭동과의 차이는 지연 대비 최대 0.07 % (3σ).</a:t>
+              <a:t>부호 합이 상쇄되는 그룹(ρ = |ΣS1| / Σ|S1| &lt; 0.5)에서는 부호 유지 기여도가 발산한다 (예제: 비구동 33/351, 구동 0/360).</a:t>
             </a:r>
           </a:p>
         </p:txBody>
